--- a/PR2025-26_VMESNA_2611.pptx
+++ b/PR2025-26_VMESNA_2611.pptx
@@ -4142,7 +4142,7 @@
           <a:p>
             <a:r>
               <a:rPr lang="sl-SI" sz="1600" dirty="0"/>
-              <a:t>Normalizacija (kazniva dejanja na 1000 ljudi): gostota kriminala v Ljubljani je visoka</a:t>
+              <a:t>Normalizacija (kazniva dejanja na 1000 prebivalcev): gostota kriminala v Ljubljani je visoka</a:t>
             </a:r>
           </a:p>
           <a:p>
@@ -4959,8 +4959,8 @@
         </p:blipFill>
         <p:spPr>
           <a:xfrm>
-            <a:off x="4663805" y="2215782"/>
-            <a:ext cx="4227774" cy="2518144"/>
+            <a:off x="4773075" y="2379286"/>
+            <a:ext cx="4009233" cy="2387977"/>
           </a:xfrm>
           <a:prstGeom prst="rect">
             <a:avLst/>
@@ -5230,10 +5230,10 @@
       </p:sp>
       <p:pic>
         <p:nvPicPr>
-          <p:cNvPr id="10" name="Slika 9">
+          <p:cNvPr id="12" name="Slika 11">
             <a:extLst>
               <a:ext uri="{FF2B5EF4-FFF2-40B4-BE49-F238E27FC236}">
-                <a16:creationId xmlns:a16="http://schemas.microsoft.com/office/drawing/2014/main" id="{65A9DAE1-3014-E139-DA3B-C9DB5E3518CF}"/>
+                <a16:creationId xmlns:a16="http://schemas.microsoft.com/office/drawing/2014/main" id="{CC2D8EE0-AE6B-7CF1-74B4-DF7F8A39A405}"/>
               </a:ext>
             </a:extLst>
           </p:cNvPr>
@@ -5250,8 +5250,8 @@
         </p:blipFill>
         <p:spPr>
           <a:xfrm>
-            <a:off x="99391" y="1806898"/>
-            <a:ext cx="4204727" cy="2927028"/>
+            <a:off x="4388363" y="2019550"/>
+            <a:ext cx="4572000" cy="2259061"/>
           </a:xfrm>
           <a:prstGeom prst="rect">
             <a:avLst/>
@@ -5260,10 +5260,10 @@
       </p:pic>
       <p:pic>
         <p:nvPicPr>
-          <p:cNvPr id="12" name="Slika 11">
+          <p:cNvPr id="5" name="Slika 4">
             <a:extLst>
               <a:ext uri="{FF2B5EF4-FFF2-40B4-BE49-F238E27FC236}">
-                <a16:creationId xmlns:a16="http://schemas.microsoft.com/office/drawing/2014/main" id="{CC2D8EE0-AE6B-7CF1-74B4-DF7F8A39A405}"/>
+                <a16:creationId xmlns:a16="http://schemas.microsoft.com/office/drawing/2014/main" id="{55B04033-83BC-4E48-964E-0E2BF2E6877D}"/>
               </a:ext>
             </a:extLst>
           </p:cNvPr>
@@ -5280,8 +5280,8 @@
         </p:blipFill>
         <p:spPr>
           <a:xfrm>
-            <a:off x="4388363" y="2019550"/>
-            <a:ext cx="4572000" cy="2259061"/>
+            <a:off x="142746" y="1872338"/>
+            <a:ext cx="4202263" cy="2757826"/>
           </a:xfrm>
           <a:prstGeom prst="rect">
             <a:avLst/>
